--- a/dist/weeks-포트폴리오제작/포트폴리오제작_05주차_스토리라인기획2.pptx
+++ b/dist/weeks-포트폴리오제작/포트폴리오제작_05주차_스토리라인기획2.pptx
@@ -6288,7 +6288,7 @@
         <p:spPr>
           <a:xfrm>
             <a:off x="1353312" y="1755648"/>
-            <a:ext cx="4248760" cy="585216"/>
+            <a:ext cx="4267048" cy="585216"/>
           </a:xfrm>
           <a:prstGeom prst="rect">
             <a:avLst/>
@@ -6416,7 +6416,7 @@
         <p:spPr>
           <a:xfrm>
             <a:off x="1353312" y="2487168"/>
-            <a:ext cx="4248760" cy="585216"/>
+            <a:ext cx="4267048" cy="585216"/>
           </a:xfrm>
           <a:prstGeom prst="rect">
             <a:avLst/>
@@ -6544,7 +6544,7 @@
         <p:spPr>
           <a:xfrm>
             <a:off x="1353312" y="3218688"/>
-            <a:ext cx="4248760" cy="585216"/>
+            <a:ext cx="4267048" cy="585216"/>
           </a:xfrm>
           <a:prstGeom prst="rect">
             <a:avLst/>
@@ -6672,7 +6672,7 @@
         <p:spPr>
           <a:xfrm>
             <a:off x="1353312" y="3950208"/>
-            <a:ext cx="4248760" cy="585216"/>
+            <a:ext cx="4267048" cy="585216"/>
           </a:xfrm>
           <a:prstGeom prst="rect">
             <a:avLst/>
@@ -6800,7 +6800,7 @@
         <p:spPr>
           <a:xfrm>
             <a:off x="7010248" y="1755648"/>
-            <a:ext cx="4248760" cy="585216"/>
+            <a:ext cx="4267048" cy="585216"/>
           </a:xfrm>
           <a:prstGeom prst="rect">
             <a:avLst/>
@@ -6928,7 +6928,7 @@
         <p:spPr>
           <a:xfrm>
             <a:off x="7010248" y="2487168"/>
-            <a:ext cx="4248760" cy="585216"/>
+            <a:ext cx="4267048" cy="585216"/>
           </a:xfrm>
           <a:prstGeom prst="rect">
             <a:avLst/>
@@ -7056,7 +7056,7 @@
         <p:spPr>
           <a:xfrm>
             <a:off x="7010248" y="3218688"/>
-            <a:ext cx="4248760" cy="585216"/>
+            <a:ext cx="4267048" cy="585216"/>
           </a:xfrm>
           <a:prstGeom prst="rect">
             <a:avLst/>
@@ -7184,7 +7184,7 @@
         <p:spPr>
           <a:xfrm>
             <a:off x="7010248" y="3950208"/>
-            <a:ext cx="4248760" cy="585216"/>
+            <a:ext cx="4267048" cy="585216"/>
           </a:xfrm>
           <a:prstGeom prst="rect">
             <a:avLst/>
@@ -7222,7 +7222,7 @@
         </p:nvSpPr>
         <p:spPr>
           <a:xfrm>
-            <a:off x="640080" y="5468112"/>
+            <a:off x="640080" y="4736592"/>
             <a:ext cx="10911535" cy="7315"/>
           </a:xfrm>
           <a:prstGeom prst="rect">
@@ -7247,7 +7247,7 @@
         </p:nvSpPr>
         <p:spPr>
           <a:xfrm>
-            <a:off x="640080" y="5577840"/>
+            <a:off x="640080" y="4846320"/>
             <a:ext cx="10911535" cy="402336"/>
           </a:xfrm>
           <a:prstGeom prst="rect">

--- a/dist/weeks-포트폴리오제작/포트폴리오제작_05주차_스토리라인기획2.pptx
+++ b/dist/weeks-포트폴리오제작/포트폴리오제작_05주차_스토리라인기획2.pptx
@@ -511,7 +511,7 @@
           <a:p>
             <a:r>
               <a:rPr lang="en-US" dirty="0"/>
-              <a:t>원본에는 '90분 전체 1:1 튜터링'으로 되어 있다. 실제 운영을 위해 앞뒤에 안내·정리 10분씩을 두고 순번제로 잡았다. 인원에 따라 1인당 시간을 조정할 것.</a:t>
+              <a:t>원본에는 '90분 전체 1:1 튜터링'으로 되어 있었으나 실제 수업이 120분이므로 튜터링을 90분으로 늘리고 앞뒤에 안내·정리 10분씩, 중간에 휴식 10분을 두었다. 1인 7분 기준 12~13명까지 소화된다. 인원에 따라 1인당 시간을 조정할 것.</a:t>
             </a:r>
             <a:endParaRPr lang="en-US" dirty="0"/>
           </a:p>
@@ -2244,7 +2244,7 @@
                 <a:ea typeface="Pretendard" pitchFamily="34" charset="-122"/>
                 <a:cs typeface="Pretendard" pitchFamily="34" charset="-120"/>
               </a:rPr>
-              <a:t>90분 — 안내 10분 · 1:1 튜터링 70분 · 정리 10분</a:t>
+              <a:t>120분 — 안내 10분 · 1:1 튜터링 90분 · 정리 10분</a:t>
             </a:r>
             <a:endParaRPr lang="en-US" sz="1200" dirty="0"/>
           </a:p>
@@ -3830,7 +3830,7 @@
                 <a:ea typeface="Pretendard Black" pitchFamily="34" charset="-122"/>
                 <a:cs typeface="Pretendard Black" pitchFamily="34" charset="-120"/>
               </a:rPr>
-              <a:t>오늘의 90분</a:t>
+              <a:t>오늘의 120분</a:t>
             </a:r>
             <a:endParaRPr lang="en-US" sz="3000" dirty="0"/>
           </a:p>
@@ -3869,7 +3869,7 @@
                 <a:ea typeface="Pretendard" pitchFamily="34" charset="-122"/>
                 <a:cs typeface="Pretendard" pitchFamily="34" charset="-120"/>
               </a:rPr>
-              <a:t>안내 10분 · 1:1 튜터링 70분 · 정리 10분</a:t>
+              <a:t>안내 10분 · 1:1 튜터링 90분 · 정리 10분</a:t>
             </a:r>
             <a:endParaRPr lang="en-US" sz="1150" dirty="0"/>
           </a:p>
@@ -3909,7 +3909,7 @@
         <p:spPr>
           <a:xfrm>
             <a:off x="640080" y="1719072"/>
-            <a:ext cx="1600200" cy="932688"/>
+            <a:ext cx="1600200" cy="830275"/>
           </a:xfrm>
           <a:prstGeom prst="rect">
             <a:avLst/>
@@ -3948,7 +3948,7 @@
         <p:spPr>
           <a:xfrm>
             <a:off x="2377440" y="1719072"/>
-            <a:ext cx="6888175" cy="932688"/>
+            <a:ext cx="6888175" cy="830275"/>
           </a:xfrm>
           <a:prstGeom prst="rect">
             <a:avLst/>
@@ -3987,7 +3987,7 @@
         <p:spPr>
           <a:xfrm>
             <a:off x="9265615" y="1719072"/>
-            <a:ext cx="2286000" cy="932688"/>
+            <a:ext cx="2286000" cy="830275"/>
           </a:xfrm>
           <a:prstGeom prst="rect">
             <a:avLst/>
@@ -4025,7 +4025,7 @@
         </p:nvSpPr>
         <p:spPr>
           <a:xfrm>
-            <a:off x="640080" y="2633472"/>
+            <a:off x="640080" y="2531059"/>
             <a:ext cx="10911535" cy="7315"/>
           </a:xfrm>
           <a:prstGeom prst="rect">
@@ -4050,8 +4050,8 @@
         </p:nvSpPr>
         <p:spPr>
           <a:xfrm>
-            <a:off x="640080" y="2651760"/>
-            <a:ext cx="1600200" cy="932688"/>
+            <a:off x="640080" y="2549347"/>
+            <a:ext cx="1600200" cy="830275"/>
           </a:xfrm>
           <a:prstGeom prst="rect">
             <a:avLst/>
@@ -4075,7 +4075,7 @@
                 <a:ea typeface="Pretendard" pitchFamily="34" charset="-122"/>
                 <a:cs typeface="Pretendard" pitchFamily="34" charset="-120"/>
               </a:rPr>
-              <a:t>00:10–01:20</a:t>
+              <a:t>00:10–01:00</a:t>
             </a:r>
             <a:endParaRPr lang="en-US" sz="1050" dirty="0"/>
           </a:p>
@@ -4089,8 +4089,8 @@
         </p:nvSpPr>
         <p:spPr>
           <a:xfrm>
-            <a:off x="2377440" y="2651760"/>
-            <a:ext cx="6888175" cy="932688"/>
+            <a:off x="2377440" y="2549347"/>
+            <a:ext cx="6888175" cy="830275"/>
           </a:xfrm>
           <a:prstGeom prst="rect">
             <a:avLst/>
@@ -4114,7 +4114,7 @@
                 <a:ea typeface="Pretendard" pitchFamily="34" charset="-122"/>
                 <a:cs typeface="Pretendard" pitchFamily="34" charset="-120"/>
               </a:rPr>
-              <a:t>개인별 1:1 튜터링</a:t>
+              <a:t>개인별 1:1 튜터링 1부</a:t>
             </a:r>
             <a:endParaRPr lang="en-US" sz="1300" dirty="0"/>
           </a:p>
@@ -4128,8 +4128,8 @@
         </p:nvSpPr>
         <p:spPr>
           <a:xfrm>
-            <a:off x="9265615" y="2651760"/>
-            <a:ext cx="2286000" cy="932688"/>
+            <a:off x="9265615" y="2549347"/>
+            <a:ext cx="2286000" cy="830275"/>
           </a:xfrm>
           <a:prstGeom prst="rect">
             <a:avLst/>
@@ -4167,7 +4167,7 @@
         </p:nvSpPr>
         <p:spPr>
           <a:xfrm>
-            <a:off x="640080" y="3566160"/>
+            <a:off x="640080" y="3361334"/>
             <a:ext cx="10911535" cy="7315"/>
           </a:xfrm>
           <a:prstGeom prst="rect">
@@ -4192,8 +4192,8 @@
         </p:nvSpPr>
         <p:spPr>
           <a:xfrm>
-            <a:off x="640080" y="3584448"/>
-            <a:ext cx="1600200" cy="932688"/>
+            <a:off x="640080" y="3379622"/>
+            <a:ext cx="1600200" cy="830275"/>
           </a:xfrm>
           <a:prstGeom prst="rect">
             <a:avLst/>
@@ -4209,6 +4209,109 @@
               <a:buNone/>
             </a:pPr>
             <a:r>
+              <a:rPr lang="en-US" sz="1050" spc="60" kern="0" dirty="0">
+                <a:solidFill>
+                  <a:srgbClr val="9B9B9B"/>
+                </a:solidFill>
+                <a:latin typeface="Pretendard" pitchFamily="34" charset="0"/>
+                <a:ea typeface="Pretendard" pitchFamily="34" charset="-122"/>
+                <a:cs typeface="Pretendard" pitchFamily="34" charset="-120"/>
+              </a:rPr>
+              <a:t>01:00–01:10</a:t>
+            </a:r>
+            <a:endParaRPr lang="en-US" sz="1050" dirty="0"/>
+          </a:p>
+        </p:txBody>
+      </p:sp>
+      <p:sp>
+        <p:nvSpPr>
+          <p:cNvPr id="19" name="Text 17"/>
+          <p:cNvSpPr/>
+          <p:nvPr/>
+        </p:nvSpPr>
+        <p:spPr>
+          <a:xfrm>
+            <a:off x="2377440" y="3379622"/>
+            <a:ext cx="6888175" cy="830275"/>
+          </a:xfrm>
+          <a:prstGeom prst="rect">
+            <a:avLst/>
+          </a:prstGeom>
+          <a:noFill/>
+          <a:ln/>
+        </p:spPr>
+        <p:txBody>
+          <a:bodyPr wrap="square" lIns="0" tIns="0" rIns="0" bIns="0" rtlCol="0" anchor="ctr"/>
+          <a:lstStyle/>
+          <a:p>
+            <a:pPr indent="0" marL="0">
+              <a:buNone/>
+            </a:pPr>
+            <a:r>
+              <a:rPr lang="en-US" sz="1100" dirty="0">
+                <a:solidFill>
+                  <a:srgbClr val="9B9B9B"/>
+                </a:solidFill>
+                <a:latin typeface="Pretendard" pitchFamily="34" charset="0"/>
+                <a:ea typeface="Pretendard" pitchFamily="34" charset="-122"/>
+                <a:cs typeface="Pretendard" pitchFamily="34" charset="-120"/>
+              </a:rPr>
+              <a:t>휴식</a:t>
+            </a:r>
+            <a:endParaRPr lang="en-US" sz="1100" dirty="0"/>
+          </a:p>
+        </p:txBody>
+      </p:sp>
+      <p:sp>
+        <p:nvSpPr>
+          <p:cNvPr id="20" name="Shape 18"/>
+          <p:cNvSpPr/>
+          <p:nvPr/>
+        </p:nvSpPr>
+        <p:spPr>
+          <a:xfrm>
+            <a:off x="640080" y="4191610"/>
+            <a:ext cx="10911535" cy="7315"/>
+          </a:xfrm>
+          <a:prstGeom prst="rect">
+            <a:avLst/>
+          </a:prstGeom>
+          <a:solidFill>
+            <a:srgbClr val="EFEFEF"/>
+          </a:solidFill>
+          <a:ln w="12700">
+            <a:solidFill>
+              <a:srgbClr val="EFEFEF"/>
+            </a:solidFill>
+            <a:prstDash val="solid"/>
+          </a:ln>
+        </p:spPr>
+      </p:sp>
+      <p:sp>
+        <p:nvSpPr>
+          <p:cNvPr id="21" name="Text 19"/>
+          <p:cNvSpPr/>
+          <p:nvPr/>
+        </p:nvSpPr>
+        <p:spPr>
+          <a:xfrm>
+            <a:off x="640080" y="4209898"/>
+            <a:ext cx="1600200" cy="830275"/>
+          </a:xfrm>
+          <a:prstGeom prst="rect">
+            <a:avLst/>
+          </a:prstGeom>
+          <a:noFill/>
+          <a:ln/>
+        </p:spPr>
+        <p:txBody>
+          <a:bodyPr wrap="square" lIns="0" tIns="0" rIns="0" bIns="0" rtlCol="0" anchor="ctr"/>
+          <a:lstStyle/>
+          <a:p>
+            <a:pPr indent="0" marL="0">
+              <a:buNone/>
+            </a:pPr>
+            <a:r>
               <a:rPr lang="en-US" sz="1050" b="1" spc="60" kern="0" dirty="0">
                 <a:solidFill>
                   <a:srgbClr val="111111"/>
@@ -4217,7 +4320,7 @@
                 <a:ea typeface="Pretendard" pitchFamily="34" charset="-122"/>
                 <a:cs typeface="Pretendard" pitchFamily="34" charset="-120"/>
               </a:rPr>
-              <a:t>01:20–01:30</a:t>
+              <a:t>01:10–01:50</a:t>
             </a:r>
             <a:endParaRPr lang="en-US" sz="1050" dirty="0"/>
           </a:p>
@@ -4225,14 +4328,14 @@
       </p:sp>
       <p:sp>
         <p:nvSpPr>
-          <p:cNvPr id="19" name="Text 17"/>
-          <p:cNvSpPr/>
-          <p:nvPr/>
-        </p:nvSpPr>
-        <p:spPr>
-          <a:xfrm>
-            <a:off x="2377440" y="3584448"/>
-            <a:ext cx="6888175" cy="932688"/>
+          <p:cNvPr id="22" name="Text 20"/>
+          <p:cNvSpPr/>
+          <p:nvPr/>
+        </p:nvSpPr>
+        <p:spPr>
+          <a:xfrm>
+            <a:off x="2377440" y="4209898"/>
+            <a:ext cx="6888175" cy="830275"/>
           </a:xfrm>
           <a:prstGeom prst="rect">
             <a:avLst/>
@@ -4256,6 +4359,148 @@
                 <a:ea typeface="Pretendard" pitchFamily="34" charset="-122"/>
                 <a:cs typeface="Pretendard" pitchFamily="34" charset="-120"/>
               </a:rPr>
+              <a:t>개인별 1:1 튜터링 2부</a:t>
+            </a:r>
+            <a:endParaRPr lang="en-US" sz="1300" dirty="0"/>
+          </a:p>
+        </p:txBody>
+      </p:sp>
+      <p:sp>
+        <p:nvSpPr>
+          <p:cNvPr id="23" name="Text 21"/>
+          <p:cNvSpPr/>
+          <p:nvPr/>
+        </p:nvSpPr>
+        <p:spPr>
+          <a:xfrm>
+            <a:off x="9265615" y="4209898"/>
+            <a:ext cx="2286000" cy="830275"/>
+          </a:xfrm>
+          <a:prstGeom prst="rect">
+            <a:avLst/>
+          </a:prstGeom>
+          <a:noFill/>
+          <a:ln/>
+        </p:spPr>
+        <p:txBody>
+          <a:bodyPr wrap="square" lIns="0" tIns="0" rIns="0" bIns="0" rtlCol="0" anchor="ctr"/>
+          <a:lstStyle/>
+          <a:p>
+            <a:pPr algn="r" indent="0" marL="0">
+              <a:buNone/>
+            </a:pPr>
+            <a:r>
+              <a:rPr lang="en-US" sz="1050" dirty="0">
+                <a:solidFill>
+                  <a:srgbClr val="6E6E6E"/>
+                </a:solidFill>
+                <a:latin typeface="Pretendard" pitchFamily="34" charset="0"/>
+                <a:ea typeface="Pretendard" pitchFamily="34" charset="-122"/>
+                <a:cs typeface="Pretendard" pitchFamily="34" charset="-120"/>
+              </a:rPr>
+              <a:t>개별 · 1인 약 7분</a:t>
+            </a:r>
+            <a:endParaRPr lang="en-US" sz="1050" dirty="0"/>
+          </a:p>
+        </p:txBody>
+      </p:sp>
+      <p:sp>
+        <p:nvSpPr>
+          <p:cNvPr id="24" name="Shape 22"/>
+          <p:cNvSpPr/>
+          <p:nvPr/>
+        </p:nvSpPr>
+        <p:spPr>
+          <a:xfrm>
+            <a:off x="640080" y="5021885"/>
+            <a:ext cx="10911535" cy="7315"/>
+          </a:xfrm>
+          <a:prstGeom prst="rect">
+            <a:avLst/>
+          </a:prstGeom>
+          <a:solidFill>
+            <a:srgbClr val="DCDCDC"/>
+          </a:solidFill>
+          <a:ln w="12700">
+            <a:solidFill>
+              <a:srgbClr val="DCDCDC"/>
+            </a:solidFill>
+            <a:prstDash val="solid"/>
+          </a:ln>
+        </p:spPr>
+      </p:sp>
+      <p:sp>
+        <p:nvSpPr>
+          <p:cNvPr id="25" name="Text 23"/>
+          <p:cNvSpPr/>
+          <p:nvPr/>
+        </p:nvSpPr>
+        <p:spPr>
+          <a:xfrm>
+            <a:off x="640080" y="5040173"/>
+            <a:ext cx="1600200" cy="830275"/>
+          </a:xfrm>
+          <a:prstGeom prst="rect">
+            <a:avLst/>
+          </a:prstGeom>
+          <a:noFill/>
+          <a:ln/>
+        </p:spPr>
+        <p:txBody>
+          <a:bodyPr wrap="square" lIns="0" tIns="0" rIns="0" bIns="0" rtlCol="0" anchor="ctr"/>
+          <a:lstStyle/>
+          <a:p>
+            <a:pPr indent="0" marL="0">
+              <a:buNone/>
+            </a:pPr>
+            <a:r>
+              <a:rPr lang="en-US" sz="1050" b="1" spc="60" kern="0" dirty="0">
+                <a:solidFill>
+                  <a:srgbClr val="111111"/>
+                </a:solidFill>
+                <a:latin typeface="Pretendard" pitchFamily="34" charset="0"/>
+                <a:ea typeface="Pretendard" pitchFamily="34" charset="-122"/>
+                <a:cs typeface="Pretendard" pitchFamily="34" charset="-120"/>
+              </a:rPr>
+              <a:t>01:50–02:00</a:t>
+            </a:r>
+            <a:endParaRPr lang="en-US" sz="1050" dirty="0"/>
+          </a:p>
+        </p:txBody>
+      </p:sp>
+      <p:sp>
+        <p:nvSpPr>
+          <p:cNvPr id="26" name="Text 24"/>
+          <p:cNvSpPr/>
+          <p:nvPr/>
+        </p:nvSpPr>
+        <p:spPr>
+          <a:xfrm>
+            <a:off x="2377440" y="5040173"/>
+            <a:ext cx="6888175" cy="830275"/>
+          </a:xfrm>
+          <a:prstGeom prst="rect">
+            <a:avLst/>
+          </a:prstGeom>
+          <a:noFill/>
+          <a:ln/>
+        </p:spPr>
+        <p:txBody>
+          <a:bodyPr wrap="square" lIns="0" tIns="0" rIns="0" bIns="0" rtlCol="0" anchor="ctr"/>
+          <a:lstStyle/>
+          <a:p>
+            <a:pPr indent="0" marL="0">
+              <a:buNone/>
+            </a:pPr>
+            <a:r>
+              <a:rPr lang="en-US" sz="1300" b="1" dirty="0">
+                <a:solidFill>
+                  <a:srgbClr val="111111"/>
+                </a:solidFill>
+                <a:latin typeface="Pretendard" pitchFamily="34" charset="0"/>
+                <a:ea typeface="Pretendard" pitchFamily="34" charset="-122"/>
+                <a:cs typeface="Pretendard" pitchFamily="34" charset="-120"/>
+              </a:rPr>
               <a:t>공통 피드백 정리 · 과제 안내</a:t>
             </a:r>
             <a:endParaRPr lang="en-US" sz="1300" dirty="0"/>
@@ -4264,14 +4509,14 @@
       </p:sp>
       <p:sp>
         <p:nvSpPr>
-          <p:cNvPr id="20" name="Text 18"/>
-          <p:cNvSpPr/>
-          <p:nvPr/>
-        </p:nvSpPr>
-        <p:spPr>
-          <a:xfrm>
-            <a:off x="9265615" y="3584448"/>
-            <a:ext cx="2286000" cy="932688"/>
+          <p:cNvPr id="27" name="Text 25"/>
+          <p:cNvSpPr/>
+          <p:nvPr/>
+        </p:nvSpPr>
+        <p:spPr>
+          <a:xfrm>
+            <a:off x="9265615" y="5040173"/>
+            <a:ext cx="2286000" cy="830275"/>
           </a:xfrm>
           <a:prstGeom prst="rect">
             <a:avLst/>
@@ -4303,14 +4548,14 @@
       </p:sp>
       <p:sp>
         <p:nvSpPr>
-          <p:cNvPr id="21" name="Shape 19"/>
-          <p:cNvSpPr/>
-          <p:nvPr/>
-        </p:nvSpPr>
-        <p:spPr>
-          <a:xfrm>
-            <a:off x="640080" y="4828032"/>
-            <a:ext cx="10911535" cy="969264"/>
+          <p:cNvPr id="28" name="Shape 26"/>
+          <p:cNvSpPr/>
+          <p:nvPr/>
+        </p:nvSpPr>
+        <p:spPr>
+          <a:xfrm>
+            <a:off x="640080" y="5852160"/>
+            <a:ext cx="10911535" cy="7315"/>
           </a:xfrm>
           <a:prstGeom prst="rect">
             <a:avLst/>
@@ -4328,88 +4573,7 @@
       </p:sp>
       <p:sp>
         <p:nvSpPr>
-          <p:cNvPr id="22" name="Text 20"/>
-          <p:cNvSpPr/>
-          <p:nvPr/>
-        </p:nvSpPr>
-        <p:spPr>
-          <a:xfrm>
-            <a:off x="1097280" y="5010912"/>
-            <a:ext cx="2743200" cy="256032"/>
-          </a:xfrm>
-          <a:prstGeom prst="rect">
-            <a:avLst/>
-          </a:prstGeom>
-          <a:noFill/>
-          <a:ln/>
-        </p:spPr>
-        <p:txBody>
-          <a:bodyPr wrap="square" lIns="0" tIns="0" rIns="0" bIns="0" rtlCol="0" anchor="ctr"/>
-          <a:lstStyle/>
-          <a:p>
-            <a:pPr indent="0" marL="0">
-              <a:buNone/>
-            </a:pPr>
-            <a:r>
-              <a:rPr lang="en-US" sz="950" spc="240" kern="0" dirty="0">
-                <a:solidFill>
-                  <a:srgbClr val="9A9A9A"/>
-                </a:solidFill>
-                <a:latin typeface="Pretendard" pitchFamily="34" charset="0"/>
-                <a:ea typeface="Pretendard" pitchFamily="34" charset="-122"/>
-                <a:cs typeface="Pretendard" pitchFamily="34" charset="-120"/>
-              </a:rPr>
-              <a:t>오늘 끝나면</a:t>
-            </a:r>
-            <a:endParaRPr lang="en-US" sz="950" dirty="0"/>
-          </a:p>
-        </p:txBody>
-      </p:sp>
-      <p:sp>
-        <p:nvSpPr>
-          <p:cNvPr id="23" name="Text 21"/>
-          <p:cNvSpPr/>
-          <p:nvPr/>
-        </p:nvSpPr>
-        <p:spPr>
-          <a:xfrm>
-            <a:off x="1097280" y="5285232"/>
-            <a:ext cx="9997135" cy="365760"/>
-          </a:xfrm>
-          <a:prstGeom prst="rect">
-            <a:avLst/>
-          </a:prstGeom>
-          <a:noFill/>
-          <a:ln/>
-        </p:spPr>
-        <p:txBody>
-          <a:bodyPr wrap="square" lIns="0" tIns="0" rIns="0" bIns="0" rtlCol="0" anchor="ctr"/>
-          <a:lstStyle/>
-          <a:p>
-            <a:pPr indent="0" marL="0">
-              <a:lnSpc>
-                <a:spcPct val="126000"/>
-              </a:lnSpc>
-              <a:buNone/>
-            </a:pPr>
-            <a:r>
-              <a:rPr lang="en-US" sz="1600" dirty="0">
-                <a:solidFill>
-                  <a:srgbClr val="FFFFFF"/>
-                </a:solidFill>
-                <a:latin typeface="Pretendard Black" pitchFamily="34" charset="0"/>
-                <a:ea typeface="Pretendard Black" pitchFamily="34" charset="-122"/>
-                <a:cs typeface="Pretendard Black" pitchFamily="34" charset="-120"/>
-              </a:rPr>
-              <a:t>스토리라인이 확정되고, 6주차부터 무엇을 만들지가 정해집니다. PART I이 오늘로 끝납니다.</a:t>
-            </a:r>
-            <a:endParaRPr lang="en-US" sz="1600" dirty="0"/>
-          </a:p>
-        </p:txBody>
-      </p:sp>
-      <p:sp>
-        <p:nvSpPr>
-          <p:cNvPr id="24" name="Shape 22"/>
+          <p:cNvPr id="29" name="Shape 27"/>
           <p:cNvSpPr/>
           <p:nvPr/>
         </p:nvSpPr>
@@ -4434,7 +4598,7 @@
       </p:sp>
       <p:sp>
         <p:nvSpPr>
-          <p:cNvPr id="25" name="Text 23"/>
+          <p:cNvPr id="30" name="Text 28"/>
           <p:cNvSpPr/>
           <p:nvPr/>
         </p:nvSpPr>
@@ -4473,7 +4637,7 @@
       </p:sp>
       <p:sp>
         <p:nvSpPr>
-          <p:cNvPr id="26" name="Text 24"/>
+          <p:cNvPr id="31" name="Text 29"/>
           <p:cNvSpPr/>
           <p:nvPr/>
         </p:nvSpPr>

--- a/dist/weeks-포트폴리오제작/포트폴리오제작_05주차_스토리라인기획2.pptx
+++ b/dist/weeks-포트폴리오제작/포트폴리오제작_05주차_스토리라인기획2.pptx
@@ -511,7 +511,8 @@
           <a:p>
             <a:r>
               <a:rPr lang="en-US" dirty="0"/>
-              <a:t>원본에는 '90분 전체 1:1 튜터링'으로 되어 있었으나 실제 수업이 120분이므로 튜터링을 90분으로 늘리고 앞뒤에 안내·정리 10분씩, 중간에 휴식 10분을 두었다. 1인 7분 기준 12~13명까지 소화된다. 인원에 따라 1인당 시간을 조정할 것.</a:t>
+              <a:t>[운영 메모]
+원본에는 '90분 전체 1:1 튜터링'으로 되어 있었으나 실제 수업이 120분이므로 튜터링을 90분으로 늘리고 앞뒤에 안내·정리 10분씩, 중간에 휴식 10분을 두었다. 1인 7분 기준 12~13명까지 소화된다. 인원에 따라 1인당 시간을 조정할 것.</a:t>
             </a:r>
             <a:endParaRPr lang="en-US" dirty="0"/>
           </a:p>
@@ -599,7 +600,8 @@
           <a:p>
             <a:r>
               <a:rPr lang="en-US" dirty="0"/>
-              <a:t>변경 이력을 요구하면 튜터링 내용이 실제로 반영됐는지 바로 확인된다.</a:t>
+              <a:t>[운영 메모]
+변경 이력을 요구하면 튜터링 내용이 실제로 반영됐는지 바로 확인된다.</a:t>
             </a:r>
             <a:endParaRPr lang="en-US" dirty="0"/>
           </a:p>
@@ -687,7 +689,8 @@
           <a:p>
             <a:r>
               <a:rPr lang="en-US" dirty="0"/>
-              <a:t>20명이면 1인당 3분 30초밖에 안 된다. 조교가 있거나 2주에 나눠 진행할 수 있다면 그렇게 하고, 아니면 아래 자가진단을 먼저 시켜 튜터링을 '확인' 중심으로 짧게 운영할 것.</a:t>
+              <a:t>[운영 메모]
+20명이면 1인당 3분 30초밖에 안 된다. 조교가 있거나 2주에 나눠 진행할 수 있다면 그렇게 하고, 아니면 아래 자가진단을 먼저 시켜 튜터링을 '확인' 중심으로 짧게 운영할 것.</a:t>
             </a:r>
             <a:endParaRPr lang="en-US" dirty="0"/>
           </a:p>
@@ -775,7 +778,8 @@
           <a:p>
             <a:r>
               <a:rPr lang="en-US" dirty="0"/>
-              <a:t>'마지막 시점'이라는 말을 분명히 할 것. 8주차 중간발표 때 방향을 바꾸겠다는 학생이 매년 나온다.</a:t>
+              <a:t>[운영 메모]
+'마지막 시점'이라는 말을 분명히 할 것. 8주차 중간발표 때 방향을 바꾸겠다는 학생이 매년 나온다.</a:t>
             </a:r>
             <a:endParaRPr lang="en-US" dirty="0"/>
           </a:p>
@@ -863,7 +867,8 @@
           <a:p>
             <a:r>
               <a:rPr lang="en-US" dirty="0"/>
-              <a:t>이 구조로 운영하면 대기 시간이 낭비되지 않는다.</a:t>
+              <a:t>[운영 메모]
+이 구조로 운영하면 대기 시간이 낭비되지 않는다.</a:t>
             </a:r>
             <a:endParaRPr lang="en-US" dirty="0"/>
           </a:p>
@@ -951,7 +956,8 @@
           <a:p>
             <a:r>
               <a:rPr lang="en-US" dirty="0"/>
-              <a:t>인쇄해서 나눠주면 운영이 훨씬 매끄럽다.</a:t>
+              <a:t>[운영 메모]
+인쇄해서 나눠주면 운영이 훨씬 매끄럽다.</a:t>
             </a:r>
             <a:endParaRPr lang="en-US" dirty="0"/>
           </a:p>
@@ -1039,7 +1045,8 @@
           <a:p>
             <a:r>
               <a:rPr lang="en-US" dirty="0"/>
-              <a:t>튜터링 전에 이 슬라이드를 띄워두면 학생이 스스로 진단하고 온다.</a:t>
+              <a:t>[운영 메모]
+튜터링 전에 이 슬라이드를 띄워두면 학생이 스스로 진단하고 온다.</a:t>
             </a:r>
             <a:endParaRPr lang="en-US" dirty="0"/>
           </a:p>
@@ -1127,7 +1134,8 @@
           <a:p>
             <a:r>
               <a:rPr lang="en-US" dirty="0"/>
-              <a:t>02가 가장 많다. 6~7주차가 그 해결 시간이라는 연결을 반드시 말해줄 것.</a:t>
+              <a:t>[운영 메모]
+02가 가장 많다. 6~7주차가 그 해결 시간이라는 연결을 반드시 말해줄 것.</a:t>
             </a:r>
             <a:endParaRPr lang="en-US" dirty="0"/>
           </a:p>
@@ -1215,7 +1223,8 @@
           <a:p>
             <a:r>
               <a:rPr lang="en-US" dirty="0"/>
-              <a:t>학생들은 곧장 '다시 만들어야 하나요'로 간다. 01부터 검토하게 하면 불필요한 재작업이 크게 줄어든다.</a:t>
+              <a:t>[운영 메모]
+학생들은 곧장 '다시 만들어야 하나요'로 간다. 01부터 검토하게 하면 불필요한 재작업이 크게 줄어든다.</a:t>
             </a:r>
             <a:endParaRPr lang="en-US" dirty="0"/>
           </a:p>
@@ -1303,7 +1312,8 @@
           <a:p>
             <a:r>
               <a:rPr lang="en-US" dirty="0"/>
-              <a:t>이 슬라이드가 실질적으로 가장 중요하다. 자료가 없어 6~7주차가 공회전하는 경우가 매년 나온다.</a:t>
+              <a:t>[운영 메모]
+이 슬라이드가 실질적으로 가장 중요하다. 자료가 없어 6~7주차가 공회전하는 경우가 매년 나온다.</a:t>
             </a:r>
             <a:endParaRPr lang="en-US" dirty="0"/>
           </a:p>
